--- a/media/exports/reports/2026-09/callbacks.pptx
+++ b/media/exports/reports/2026-09/callbacks.pptx
@@ -1000,7 +1000,7 @@
           <a:lstStyle/>
           <a:p>
             <a:r>
-              <a:t>How long do customers wait for a callback?. Sample Electrical &amp; Air Pty Ltd. Period: September 2026. Every customer enquiry (phone, web form, email) and how long until someone first called back, in working minutes. Every call-out job has the enquiry that booked it.</a:t>
+              <a:t>How long do customers wait for a callback?. Sample Electrical &amp; Air Pty Ltd. Period: September 2026. In short: 48.7% called back within 2 working hours in September (target 80.0%); median wait 122 working minutes. Every customer enquiry (phone, web form, email) and how long until someone first called back, in working minutes. Every call-out job has the enquiry that booked it.</a:t>
             </a:r>
           </a:p>
         </p:txBody>
@@ -4365,7 +4365,7 @@
         <p:spPr>
           <a:xfrm>
             <a:off x="457200" y="3703320"/>
-            <a:ext cx="11277295" cy="535940"/>
+            <a:ext cx="11277295" cy="758190"/>
           </a:xfrm>
           <a:prstGeom prst="rect">
             <a:avLst/>
@@ -4390,7 +4390,7 @@
                 </a:solidFill>
                 <a:latin typeface="Roboto"/>
               </a:rPr>
-              <a:t>Period: September 2026. Every customer enquiry (phone, web form, email) and how long until someone first called back, in working minutes. Every call-out job has the enquiry that booked it.</a:t>
+              <a:t>Period: September 2026. In short: 48.7% called back within 2 working hours in September (target 80.0%); median wait 122 working minutes. Every customer enquiry (phone, web form, email) and how long until someone first called back, in working minutes. Every call-out job has the enquiry that booked it.</a:t>
             </a:r>
           </a:p>
         </p:txBody>
@@ -4403,7 +4403,7 @@
         </p:nvSpPr>
         <p:spPr>
           <a:xfrm>
-            <a:off x="457200" y="4330700"/>
+            <a:off x="457200" y="4552950"/>
             <a:ext cx="11277295" cy="1097280"/>
           </a:xfrm>
           <a:prstGeom prst="rect">
@@ -4555,7 +4555,7 @@
                 </a:solidFill>
                 <a:latin typeface="Roboto"/>
               </a:rPr>
-              <a:t>Data retrieved 2pm, Tue 6 Oct 2026 · Generated 8 Oct 2026, 6:28pm · Sample data · Made with Python (python-pptx)</a:t>
+              <a:t>Data retrieved 2pm, Tue 6 Oct 2026 · Generated 10 Oct 2026, 9:55pm · Sample data · Made with Python (python-pptx)</a:t>
             </a:r>
           </a:p>
         </p:txBody>
@@ -5622,7 +5622,7 @@
                 </a:solidFill>
                 <a:latin typeface="Roboto"/>
               </a:rPr>
-              <a:t>Data retrieved 2pm, Tue 6 Oct 2026 · Generated 8 Oct 2026, 6:28pm · Sample data · Made with Python (python-pptx)</a:t>
+              <a:t>Data retrieved 2pm, Tue 6 Oct 2026 · Generated 10 Oct 2026, 9:55pm · Sample data · Made with Python (python-pptx)</a:t>
             </a:r>
           </a:p>
         </p:txBody>
@@ -6051,7 +6051,7 @@
                 </a:solidFill>
                 <a:latin typeface="Roboto"/>
               </a:rPr>
-              <a:t>Data retrieved 2pm, Tue 6 Oct 2026 · Generated 8 Oct 2026, 6:28pm · Sample data · Made with Python (python-pptx)</a:t>
+              <a:t>Data retrieved 2pm, Tue 6 Oct 2026 · Generated 10 Oct 2026, 9:55pm · Sample data · Made with Python (python-pptx)</a:t>
             </a:r>
           </a:p>
         </p:txBody>
